--- a/public/fun/pack/pptx/talkpro/발표템플릿프리미엄_17_교육·강의_코발트아이보리.pptx
+++ b/public/fun/pack/pptx/talkpro/발표템플릿프리미엄_17_교육·강의_코발트아이보리.pptx
@@ -115,12 +115,12 @@
   <p:extLst>
     <p:ext uri="{521415D9-36F7-43E2-AB2F-B90AF26B5E84}">
       <p14:sectionLst xmlns:p14="http://schemas.microsoft.com/office/powerpoint/2010/main">
-        <p14:section name="시작" id="{9CA9806C-1031-4D3A-A0D0-8E482A5913C8}">
+        <p14:section name="시작" id="{3BF0284A-1B6C-4B4B-B0CE-BD6C3DC86E9C}">
           <p14:sldIdLst>
             <p14:sldId id="256"/>
           </p14:sldIdLst>
         </p14:section>
-        <p14:section name="본문" id="{966D916F-771A-4B1A-ADC2-D124E0676CB1}">
+        <p14:section name="본문" id="{6E6D61B8-F157-48DF-AABA-8D56F130CBD8}">
           <p14:sldIdLst>
             <p14:sldId id="257"/>
             <p14:sldId id="258"/>
@@ -131,7 +131,7 @@
             <p14:sldId id="263"/>
           </p14:sldIdLst>
         </p14:section>
-        <p14:section name="마무리" id="{7807677C-99E4-451E-A133-15B441D73A11}">
+        <p14:section name="마무리" id="{8D9CBACD-1740-42A3-A5C5-E82BD81BB05B}">
           <p14:sldIdLst>
             <p14:sldId id="264"/>
           </p14:sldIdLst>
@@ -1877,7 +1877,7 @@
             </a:lvl1pPr>
           </a:lstStyle>
           <a:p>
-            <a:fld id="{2ABA4762-769B-4DF2-A94D-7BD28D111B4C}" type="slidenum">
+            <a:fld id="{861B2A1A-5261-4198-8881-03D5817A3FFC}" type="slidenum">
               <a:rPr lang="en-US"/>
               <a:t>‹#›</a:t>
             </a:fld>
@@ -2601,7 +2601,7 @@
             </a:lvl1pPr>
           </a:lstStyle>
           <a:p>
-            <a:fld id="{15941494-1744-4287-9CB4-E5EE287B7A95}" type="slidenum">
+            <a:fld id="{D99D6B32-39F2-41C7-9E4C-52DA3E1FDC36}" type="slidenum">
               <a:rPr lang="en-US"/>
               <a:t>‹#›</a:t>
             </a:fld>
@@ -3350,7 +3350,7 @@
             </a:lvl1pPr>
           </a:lstStyle>
           <a:p>
-            <a:fld id="{719BE460-5326-4534-86DB-8EE835FE9924}" type="slidenum">
+            <a:fld id="{8317B7EA-92F9-446C-84CB-4B9552D6BFDE}" type="slidenum">
               <a:rPr lang="en-US"/>
               <a:t>‹#›</a:t>
             </a:fld>
@@ -4263,7 +4263,7 @@
           <a:p>
             <a:r>
               <a:rPr lang="ko-KR"/>
-              <a:t>0000. 00. 00</a:t>
+              <a:t>날짜 입력</a:t>
             </a:r>
           </a:p>
         </p:txBody>
@@ -4370,7 +4370,7 @@
           <a:bodyPr/>
           <a:lstStyle/>
           <a:p>
-            <a:fld id="{4BA6579B-AF24-4AA3-8C35-41069D94E8CE}" type="slidenum">
+            <a:fld id="{DEF7B25D-0F2A-4BF9-B725-511C61282412}" type="slidenum">
               <a:rPr lang="en-US"/>
               <a:t>‹#›</a:t>
             </a:fld>
@@ -5502,7 +5502,7 @@
           <a:bodyPr/>
           <a:lstStyle/>
           <a:p>
-            <a:fld id="{EDE67AA3-0557-49AD-B4A0-1C4EF69B21EB}" type="slidenum">
+            <a:fld id="{58CFDFB2-DC45-4638-8002-F39C0DC653D3}" type="slidenum">
               <a:rPr lang="en-US"/>
               <a:t>‹#›</a:t>
             </a:fld>
@@ -5612,7 +5612,7 @@
           <a:bodyPr/>
           <a:lstStyle/>
           <a:p>
-            <a:fld id="{B1F6C301-F74E-4BA5-90FF-9B80099CA0B3}" type="slidenum">
+            <a:fld id="{F9548CF0-72D1-4188-8F2A-B154A222A1C1}" type="slidenum">
               <a:rPr lang="en-US"/>
               <a:t>‹#›</a:t>
             </a:fld>
@@ -6538,7 +6538,7 @@
           <a:bodyPr/>
           <a:lstStyle/>
           <a:p>
-            <a:fld id="{D8FEE1F6-1218-477D-92A3-26A8203226DF}" type="slidenum">
+            <a:fld id="{66AFE3FA-111F-4880-9A78-066AC5BFF066}" type="slidenum">
               <a:rPr lang="en-US"/>
               <a:t>‹#›</a:t>
             </a:fld>
@@ -7162,7 +7162,7 @@
           <a:bodyPr/>
           <a:lstStyle/>
           <a:p>
-            <a:fld id="{8CABE6C4-0992-499F-B24E-867154602B6E}" type="slidenum">
+            <a:fld id="{2DC40F28-EDC0-4A15-8286-4F731035499E}" type="slidenum">
               <a:rPr lang="en-US"/>
               <a:t>‹#›</a:t>
             </a:fld>
@@ -7367,7 +7367,7 @@
           <a:bodyPr/>
           <a:lstStyle/>
           <a:p>
-            <a:fld id="{CB03977C-533C-47E2-818E-CFCF9A7B5C11}" type="slidenum">
+            <a:fld id="{43CB8BC6-FF51-4705-8E97-94302A43ABF7}" type="slidenum">
               <a:rPr lang="en-US"/>
               <a:t>‹#›</a:t>
             </a:fld>
@@ -8453,7 +8453,7 @@
           <a:bodyPr/>
           <a:lstStyle/>
           <a:p>
-            <a:fld id="{19A37979-EC8C-4687-9A30-231F4342280D}" type="slidenum">
+            <a:fld id="{D160A310-5269-40CD-851E-681CF4EA1945}" type="slidenum">
               <a:rPr lang="en-US"/>
               <a:t>‹#›</a:t>
             </a:fld>
